--- a/madd-decks/dagger-alif/10-fa-qaf.pptx
+++ b/madd-decks/dagger-alif/10-fa-qaf.pptx
@@ -4,6 +4,9 @@
   <p:sldMasterIdLst>
     <p:sldMasterId id="2147483648" r:id="rId1"/>
   </p:sldMasterIdLst>
+  <p:notesMasterIdLst>
+    <p:notesMasterId r:id="rId25"/>
+  </p:notesMasterIdLst>
   <p:sldIdLst>
     <p:sldId id="256" r:id="rId2"/>
     <p:sldId id="257" r:id="rId3"/>
@@ -29,9 +32,6 @@
     <p:sldId id="277" r:id="rId23"/>
     <p:sldId id="278" r:id="rId24"/>
   </p:sldIdLst>
-  <p:notesMasterIdLst>
-    <p:notesMasterId r:id="rId25"/>
-  </p:notesMasterIdLst>
   <p:sldSz cx="9144000" cy="5143500"/>
   <p:notesSz cx="5143500" cy="9144000"/>
   <p:defaultTextStyle>
@@ -4666,9 +4666,6 @@
               </a:rPr>
               <a:t>قَ</a:t>
             </a:r>
-            <a:pPr algn="ctr" indent="0" marL="0">
-              <a:buNone/>
-            </a:pPr>
             <a:r>
               <a:rPr lang="ar-SA" altLang="en-US" sz="5850" dirty="0">
                 <a:solidFill>
@@ -4680,9 +4677,6 @@
               </a:rPr>
               <a:t>ا</a:t>
             </a:r>
-            <a:pPr algn="ctr" indent="0" marL="0">
-              <a:buNone/>
-            </a:pPr>
             <a:r>
               <a:rPr lang="ar-SA" altLang="en-US" sz="9000" dirty="0">
                 <a:solidFill>
@@ -6105,9 +6099,6 @@
               </a:rPr>
               <a:t>قَ</a:t>
             </a:r>
-            <a:pPr algn="ctr" indent="0" marL="0">
-              <a:buNone/>
-            </a:pPr>
             <a:r>
               <a:rPr lang="ar-SA" altLang="en-US" sz="5850" dirty="0">
                 <a:solidFill>
@@ -6119,9 +6110,6 @@
               </a:rPr>
               <a:t>ا</a:t>
             </a:r>
-            <a:pPr algn="ctr" indent="0" marL="0">
-              <a:buNone/>
-            </a:pPr>
             <a:r>
               <a:rPr lang="ar-SA" altLang="en-US" sz="9000" dirty="0">
                 <a:solidFill>
@@ -7672,9 +7660,6 @@
               </a:rPr>
               <a:t>كَشَفَ</a:t>
             </a:r>
-            <a:pPr algn="ctr" indent="0" marL="0">
-              <a:buNone/>
-            </a:pPr>
             <a:r>
               <a:rPr lang="ar-SA" altLang="en-US" sz="4290" dirty="0">
                 <a:solidFill>
@@ -9387,9 +9372,6 @@
               </a:rPr>
               <a:t>عَرَفَ</a:t>
             </a:r>
-            <a:pPr algn="ctr" indent="0" marL="0">
-              <a:buNone/>
-            </a:pPr>
             <a:r>
               <a:rPr lang="ar-SA" altLang="en-US" sz="4290" dirty="0">
                 <a:solidFill>
@@ -11102,9 +11084,6 @@
               </a:rPr>
               <a:t>وَقَفَ</a:t>
             </a:r>
-            <a:pPr algn="ctr" indent="0" marL="0">
-              <a:buNone/>
-            </a:pPr>
             <a:r>
               <a:rPr lang="ar-SA" altLang="en-US" sz="4290" dirty="0">
                 <a:solidFill>
@@ -12817,9 +12796,6 @@
               </a:rPr>
               <a:t>فَ</a:t>
             </a:r>
-            <a:pPr algn="ctr" indent="0" marL="0">
-              <a:buNone/>
-            </a:pPr>
             <a:r>
               <a:rPr lang="ar-SA" altLang="en-US" sz="4290" dirty="0">
                 <a:solidFill>
@@ -12831,9 +12807,6 @@
               </a:rPr>
               <a:t>ا</a:t>
             </a:r>
-            <a:pPr algn="ctr" indent="0" marL="0">
-              <a:buNone/>
-            </a:pPr>
             <a:r>
               <a:rPr lang="ar-SA" altLang="en-US" sz="6600" dirty="0">
                 <a:solidFill>
@@ -14546,9 +14519,6 @@
               </a:rPr>
               <a:t>فَ</a:t>
             </a:r>
-            <a:pPr algn="ctr" indent="0" marL="0">
-              <a:buNone/>
-            </a:pPr>
             <a:r>
               <a:rPr lang="ar-SA" altLang="en-US" sz="4290" dirty="0">
                 <a:solidFill>
@@ -14560,9 +14530,6 @@
               </a:rPr>
               <a:t>ا</a:t>
             </a:r>
-            <a:pPr algn="ctr" indent="0" marL="0">
-              <a:buNone/>
-            </a:pPr>
             <a:r>
               <a:rPr lang="ar-SA" altLang="en-US" sz="6600" dirty="0">
                 <a:solidFill>
@@ -16275,9 +16242,6 @@
               </a:rPr>
               <a:t>فَ</a:t>
             </a:r>
-            <a:pPr algn="ctr" indent="0" marL="0">
-              <a:buNone/>
-            </a:pPr>
             <a:r>
               <a:rPr lang="ar-SA" altLang="en-US" sz="4290" dirty="0">
                 <a:solidFill>
@@ -16289,9 +16253,6 @@
               </a:rPr>
               <a:t>ا</a:t>
             </a:r>
-            <a:pPr algn="ctr" indent="0" marL="0">
-              <a:buNone/>
-            </a:pPr>
             <a:r>
               <a:rPr lang="ar-SA" altLang="en-US" sz="6600" dirty="0">
                 <a:solidFill>
@@ -18004,9 +17965,6 @@
               </a:rPr>
               <a:t>سَرَقَ</a:t>
             </a:r>
-            <a:pPr algn="ctr" indent="0" marL="0">
-              <a:buNone/>
-            </a:pPr>
             <a:r>
               <a:rPr lang="ar-SA" altLang="en-US" sz="4290" dirty="0">
                 <a:solidFill>
@@ -19719,9 +19677,6 @@
               </a:rPr>
               <a:t>خَلَقَ</a:t>
             </a:r>
-            <a:pPr algn="ctr" indent="0" marL="0">
-              <a:buNone/>
-            </a:pPr>
             <a:r>
               <a:rPr lang="ar-SA" altLang="en-US" sz="4290" dirty="0">
                 <a:solidFill>
@@ -21306,9 +21261,6 @@
               </a:rPr>
               <a:t>عَفَ</a:t>
             </a:r>
-            <a:pPr algn="ctr" indent="0" marL="0">
-              <a:buNone/>
-            </a:pPr>
             <a:r>
               <a:rPr lang="ar-SA" altLang="en-US" sz="5850" dirty="0">
                 <a:solidFill>
@@ -22859,9 +22811,6 @@
               </a:rPr>
               <a:t>سَبَقَ</a:t>
             </a:r>
-            <a:pPr algn="ctr" indent="0" marL="0">
-              <a:buNone/>
-            </a:pPr>
             <a:r>
               <a:rPr lang="ar-SA" altLang="en-US" sz="4290" dirty="0">
                 <a:solidFill>
@@ -24574,9 +24523,6 @@
               </a:rPr>
               <a:t>قَ</a:t>
             </a:r>
-            <a:pPr algn="ctr" indent="0" marL="0">
-              <a:buNone/>
-            </a:pPr>
             <a:r>
               <a:rPr lang="ar-SA" altLang="en-US" sz="4290" dirty="0">
                 <a:solidFill>
@@ -24588,9 +24534,6 @@
               </a:rPr>
               <a:t>ا</a:t>
             </a:r>
-            <a:pPr algn="ctr" indent="0" marL="0">
-              <a:buNone/>
-            </a:pPr>
             <a:r>
               <a:rPr lang="ar-SA" altLang="en-US" sz="6600" dirty="0">
                 <a:solidFill>
@@ -26303,9 +26246,6 @@
               </a:rPr>
               <a:t>قَ</a:t>
             </a:r>
-            <a:pPr algn="ctr" indent="0" marL="0">
-              <a:buNone/>
-            </a:pPr>
             <a:r>
               <a:rPr lang="ar-SA" altLang="en-US" sz="4290" dirty="0">
                 <a:solidFill>
@@ -26317,9 +26257,6 @@
               </a:rPr>
               <a:t>ا</a:t>
             </a:r>
-            <a:pPr algn="ctr" indent="0" marL="0">
-              <a:buNone/>
-            </a:pPr>
             <a:r>
               <a:rPr lang="ar-SA" altLang="en-US" sz="6600" dirty="0">
                 <a:solidFill>
@@ -28032,9 +27969,6 @@
               </a:rPr>
               <a:t>قَ</a:t>
             </a:r>
-            <a:pPr algn="ctr" indent="0" marL="0">
-              <a:buNone/>
-            </a:pPr>
             <a:r>
               <a:rPr lang="ar-SA" altLang="en-US" sz="4290" dirty="0">
                 <a:solidFill>
@@ -28046,9 +27980,6 @@
               </a:rPr>
               <a:t>ا</a:t>
             </a:r>
-            <a:pPr algn="ctr" indent="0" marL="0">
-              <a:buNone/>
-            </a:pPr>
             <a:r>
               <a:rPr lang="ar-SA" altLang="en-US" sz="6600" dirty="0">
                 <a:solidFill>
@@ -29633,9 +29564,6 @@
               </a:rPr>
               <a:t>صَفَ</a:t>
             </a:r>
-            <a:pPr algn="ctr" indent="0" marL="0">
-              <a:buNone/>
-            </a:pPr>
             <a:r>
               <a:rPr lang="ar-SA" altLang="en-US" sz="5850" dirty="0">
                 <a:solidFill>
@@ -31058,9 +30986,6 @@
               </a:rPr>
               <a:t>فَ</a:t>
             </a:r>
-            <a:pPr algn="ctr" indent="0" marL="0">
-              <a:buNone/>
-            </a:pPr>
             <a:r>
               <a:rPr lang="ar-SA" altLang="en-US" sz="5850" dirty="0">
                 <a:solidFill>
@@ -31072,9 +30997,6 @@
               </a:rPr>
               <a:t>ا</a:t>
             </a:r>
-            <a:pPr algn="ctr" indent="0" marL="0">
-              <a:buNone/>
-            </a:pPr>
             <a:r>
               <a:rPr lang="ar-SA" altLang="en-US" sz="9000" dirty="0">
                 <a:solidFill>
@@ -32497,9 +32419,6 @@
               </a:rPr>
               <a:t>فَ</a:t>
             </a:r>
-            <a:pPr algn="ctr" indent="0" marL="0">
-              <a:buNone/>
-            </a:pPr>
             <a:r>
               <a:rPr lang="ar-SA" altLang="en-US" sz="5850" dirty="0">
                 <a:solidFill>
@@ -32511,9 +32430,6 @@
               </a:rPr>
               <a:t>ا</a:t>
             </a:r>
-            <a:pPr algn="ctr" indent="0" marL="0">
-              <a:buNone/>
-            </a:pPr>
             <a:r>
               <a:rPr lang="ar-SA" altLang="en-US" sz="9000" dirty="0">
                 <a:solidFill>
@@ -33936,9 +33852,6 @@
               </a:rPr>
               <a:t>فَ</a:t>
             </a:r>
-            <a:pPr algn="ctr" indent="0" marL="0">
-              <a:buNone/>
-            </a:pPr>
             <a:r>
               <a:rPr lang="ar-SA" altLang="en-US" sz="5850" dirty="0">
                 <a:solidFill>
@@ -33950,9 +33863,6 @@
               </a:rPr>
               <a:t>ا</a:t>
             </a:r>
-            <a:pPr algn="ctr" indent="0" marL="0">
-              <a:buNone/>
-            </a:pPr>
             <a:r>
               <a:rPr lang="ar-SA" altLang="en-US" sz="9000" dirty="0">
                 <a:solidFill>
@@ -36297,9 +36207,6 @@
               </a:rPr>
               <a:t>رَقَ</a:t>
             </a:r>
-            <a:pPr algn="ctr" indent="0" marL="0">
-              <a:buNone/>
-            </a:pPr>
             <a:r>
               <a:rPr lang="ar-SA" altLang="en-US" sz="5850" dirty="0">
                 <a:solidFill>
@@ -37722,9 +37629,6 @@
               </a:rPr>
               <a:t>قَ</a:t>
             </a:r>
-            <a:pPr algn="ctr" indent="0" marL="0">
-              <a:buNone/>
-            </a:pPr>
             <a:r>
               <a:rPr lang="ar-SA" altLang="en-US" sz="5850" dirty="0">
                 <a:solidFill>
@@ -37736,9 +37640,6 @@
               </a:rPr>
               <a:t>ا</a:t>
             </a:r>
-            <a:pPr algn="ctr" indent="0" marL="0">
-              <a:buNone/>
-            </a:pPr>
             <a:r>
               <a:rPr lang="ar-SA" altLang="en-US" sz="9000" dirty="0">
                 <a:solidFill>
